--- a/tools/rcn-agreement-checker-intro.pptx
+++ b/tools/rcn-agreement-checker-intro.pptx
@@ -6168,7 +6168,7 @@
         <p:spPr>
           <a:xfrm>
             <a:off x="612647" y="1664208"/>
-            <a:ext cx="7004303" cy="4065683"/>
+            <a:ext cx="7004303" cy="4482650"/>
           </a:xfrm>
           <a:prstGeom prst="rect">
             <a:avLst/>
@@ -6222,7 +6222,7 @@
         <p:spPr>
           <a:xfrm>
             <a:off x="640080" y="1691640"/>
-            <a:ext cx="6949440" cy="4010819"/>
+            <a:ext cx="6949440" cy="4427786"/>
           </a:xfrm>
           <a:prstGeom prst="rect">
             <a:avLst/>
@@ -13482,7 +13482,7 @@
         <p:spPr>
           <a:xfrm>
             <a:off x="6364224" y="4041648"/>
-            <a:ext cx="2240280" cy="293179"/>
+            <a:ext cx="2240280" cy="513206"/>
           </a:xfrm>
           <a:prstGeom prst="rect">
             <a:avLst/>
@@ -13507,7 +13507,7 @@
                 </a:solidFill>
                 <a:latin typeface="Calibri"/>
               </a:rPr>
-              <a:t>Soft words</a:t>
+              <a:t>What a rule takes for granted</a:t>
             </a:r>
           </a:p>
         </p:txBody>
@@ -13520,8 +13520,8 @@
         </p:nvSpPr>
         <p:spPr>
           <a:xfrm>
-            <a:off x="6364224" y="4389691"/>
-            <a:ext cx="2240280" cy="1462468"/>
+            <a:off x="6364224" y="4609719"/>
+            <a:ext cx="2240280" cy="1242441"/>
           </a:xfrm>
           <a:prstGeom prst="rect">
             <a:avLst/>
@@ -13546,7 +13546,7 @@
                 </a:solidFill>
                 <a:latin typeface="Calibri"/>
               </a:rPr>
-              <a:t>"Should" is softer than MUST. Which do you mean?</a:t>
+              <a:t>Who counts as a gardener? Who assigns the "assigned days"?</a:t>
             </a:r>
           </a:p>
         </p:txBody>
@@ -13606,7 +13606,7 @@
         <p:spPr>
           <a:xfrm>
             <a:off x="9134855" y="4041648"/>
-            <a:ext cx="2240280" cy="293179"/>
+            <a:ext cx="2240280" cy="513206"/>
           </a:xfrm>
           <a:prstGeom prst="rect">
             <a:avLst/>
@@ -13631,7 +13631,7 @@
                 </a:solidFill>
                 <a:latin typeface="Calibri"/>
               </a:rPr>
-              <a:t>Missing people</a:t>
+              <a:t>Soft words, missing people</a:t>
             </a:r>
           </a:p>
         </p:txBody>
@@ -13644,8 +13644,8 @@
         </p:nvSpPr>
         <p:spPr>
           <a:xfrm>
-            <a:off x="9134855" y="4389691"/>
-            <a:ext cx="2240280" cy="1462468"/>
+            <a:off x="9134855" y="4609719"/>
+            <a:ext cx="2240280" cy="1242441"/>
           </a:xfrm>
           <a:prstGeom prst="rect">
             <a:avLst/>
@@ -13670,7 +13670,7 @@
                 </a:solidFill>
                 <a:latin typeface="Calibri"/>
               </a:rPr>
-              <a:t>"Fees must be paid": who pays? "They": who are they?</a:t>
+              <a:t>"Should" is softer than MUST. "Fees must be paid": who pays?</a:t>
             </a:r>
           </a:p>
         </p:txBody>
@@ -13865,8 +13865,8 @@
         </p:nvSpPr>
         <p:spPr>
           <a:xfrm>
-            <a:off x="1150851" y="1664208"/>
-            <a:ext cx="5562137" cy="4535424"/>
+            <a:off x="1591514" y="1664208"/>
+            <a:ext cx="4680810" cy="4535424"/>
           </a:xfrm>
           <a:prstGeom prst="rect">
             <a:avLst/>
@@ -13919,8 +13919,8 @@
         </p:blipFill>
         <p:spPr>
           <a:xfrm>
-            <a:off x="1178283" y="1691640"/>
-            <a:ext cx="5507273" cy="4480560"/>
+            <a:off x="1618946" y="1691640"/>
+            <a:ext cx="4625946" cy="4480560"/>
           </a:xfrm>
           <a:prstGeom prst="rect">
             <a:avLst/>
@@ -14601,7 +14601,7 @@
         <p:spPr>
           <a:xfrm>
             <a:off x="612647" y="1664208"/>
-            <a:ext cx="7004303" cy="3306209"/>
+            <a:ext cx="7004303" cy="3440234"/>
           </a:xfrm>
           <a:prstGeom prst="rect">
             <a:avLst/>
@@ -14655,7 +14655,7 @@
         <p:spPr>
           <a:xfrm>
             <a:off x="640080" y="1691640"/>
-            <a:ext cx="6949440" cy="3251345"/>
+            <a:ext cx="6949440" cy="3385370"/>
           </a:xfrm>
           <a:prstGeom prst="rect">
             <a:avLst/>

--- a/tools/rcn-agreement-checker-intro.pptx
+++ b/tools/rcn-agreement-checker-intro.pptx
@@ -6380,7 +6380,7 @@
                 </a:solidFill>
                 <a:latin typeface="Calibri"/>
               </a:rPr>
-              <a:t>Opens in the RCN Graph Tool: each sentence with its answers, red arrows for what backs what.</a:t>
+              <a:t>Opens in the RCN Graph Tool: red arrows for what backs what, purple for who a rule means.</a:t>
             </a:r>
           </a:p>
         </p:txBody>
